--- a/proposals/機種分析/東京喰種/tokyoghoul_guide_v1.pptx
+++ b/proposals/機種分析/東京喰種/tokyoghoul_guide_v1.pptx
@@ -11389,8 +11389,8 @@
         </p:nvSpPr>
         <p:spPr>
           <a:xfrm>
-            <a:off x="8275320" y="658368"/>
-            <a:ext cx="731520" cy="3500000"/>
+            <a:off x="274320" y="4206240"/>
+            <a:ext cx="8595360" cy="380000"/>
           </a:xfrm>
           <a:prstGeom prst="rect">
             <a:avLst/>
@@ -11400,7 +11400,7 @@
           </a:solidFill>
           <a:ln w="12700">
             <a:solidFill>
-              <a:srgbClr val="8833CC"/>
+              <a:srgbClr val="C8A840"/>
             </a:solidFill>
           </a:ln>
         </p:spPr>
@@ -11434,40 +11434,29 @@
         </p:nvSpPr>
         <p:spPr>
           <a:xfrm>
-            <a:off x="8295320" y="758368"/>
-            <a:ext cx="594360" cy="3300000"/>
-          </a:xfrm>
-          <a:prstGeom prst="rect">
-            <a:avLst/>
-          </a:prstGeom>
-          <a:noFill/>
-        </p:spPr>
-        <p:txBody>
-          <a:bodyPr wrap="square">
-            <a:spAutoFit/>
-          </a:bodyPr>
-          <a:lstStyle/>
-          <a:p>
-            <a:pPr algn="ctr"/>
-            <a:r>
-              <a:rPr sz="700" b="1">
-                <a:solidFill>
-                  <a:srgbClr val="AA55EE"/>
+            <a:off x="457200" y="4256240"/>
+            <a:ext cx="8229600" cy="300000"/>
+          </a:xfrm>
+          <a:prstGeom prst="rect">
+            <a:avLst/>
+          </a:prstGeom>
+          <a:noFill/>
+        </p:spPr>
+        <p:txBody>
+          <a:bodyPr wrap="square">
+            <a:spAutoFit/>
+          </a:bodyPr>
+          <a:lstStyle/>
+          <a:p>
+            <a:pPr algn="l"/>
+            <a:r>
+              <a:rPr sz="850" b="1">
+                <a:solidFill>
+                  <a:srgbClr val="C8A840"/>
                 </a:solidFill>
                 <a:latin typeface="メイリオ"/>
               </a:rPr>
-              <a:t>裏AT
-中の
-喰種
-対決
-有馬
-乱入
-大幅
-UP
-約
-3430
-枚
-確定</a:t>
+              <a:t>設定差ポイント: 高設定ほど「非有馬経由」AT当選時の裏AT直行率が高い。高設定台の爆発力の根幹がここにある。</a:t>
             </a:r>
           </a:p>
         </p:txBody>
@@ -11480,19 +11469,17 @@
         </p:nvSpPr>
         <p:spPr>
           <a:xfrm>
-            <a:off x="274320" y="4206240"/>
-            <a:ext cx="8595360" cy="380000"/>
-          </a:xfrm>
-          <a:prstGeom prst="rect">
-            <a:avLst/>
-          </a:prstGeom>
-          <a:solidFill>
-            <a:srgbClr val="160A28"/>
-          </a:solidFill>
-          <a:ln w="12700">
-            <a:solidFill>
-              <a:srgbClr val="C8A840"/>
-            </a:solidFill>
+            <a:off x="0" y="4617720"/>
+            <a:ext cx="9144000" cy="502920"/>
+          </a:xfrm>
+          <a:prstGeom prst="rect">
+            <a:avLst/>
+          </a:prstGeom>
+          <a:solidFill>
+            <a:srgbClr val="060214"/>
+          </a:solidFill>
+          <a:ln>
+            <a:noFill/>
           </a:ln>
         </p:spPr>
         <p:style>
@@ -11525,84 +11512,6 @@
         </p:nvSpPr>
         <p:spPr>
           <a:xfrm>
-            <a:off x="457200" y="4256240"/>
-            <a:ext cx="8229600" cy="300000"/>
-          </a:xfrm>
-          <a:prstGeom prst="rect">
-            <a:avLst/>
-          </a:prstGeom>
-          <a:noFill/>
-        </p:spPr>
-        <p:txBody>
-          <a:bodyPr wrap="square">
-            <a:spAutoFit/>
-          </a:bodyPr>
-          <a:lstStyle/>
-          <a:p>
-            <a:pPr algn="l"/>
-            <a:r>
-              <a:rPr sz="850" b="1">
-                <a:solidFill>
-                  <a:srgbClr val="C8A840"/>
-                </a:solidFill>
-                <a:latin typeface="メイリオ"/>
-              </a:rPr>
-              <a:t>設定差ポイント: 高設定ほど「非有馬経由」AT当選時の裏AT直行率が高い。高設定台の爆発力の根幹がここにある。</a:t>
-            </a:r>
-          </a:p>
-        </p:txBody>
-      </p:sp>
-      <p:sp>
-        <p:nvSpPr>
-          <p:cNvPr id="29" name="Rectangle 28"/>
-          <p:cNvSpPr/>
-          <p:nvPr/>
-        </p:nvSpPr>
-        <p:spPr>
-          <a:xfrm>
-            <a:off x="0" y="4617720"/>
-            <a:ext cx="9144000" cy="502920"/>
-          </a:xfrm>
-          <a:prstGeom prst="rect">
-            <a:avLst/>
-          </a:prstGeom>
-          <a:solidFill>
-            <a:srgbClr val="060214"/>
-          </a:solidFill>
-          <a:ln>
-            <a:noFill/>
-          </a:ln>
-        </p:spPr>
-        <p:style>
-          <a:lnRef idx="1">
-            <a:schemeClr val="accent1"/>
-          </a:lnRef>
-          <a:fillRef idx="3">
-            <a:schemeClr val="accent1"/>
-          </a:fillRef>
-          <a:effectRef idx="2">
-            <a:schemeClr val="accent1"/>
-          </a:effectRef>
-          <a:fontRef idx="minor">
-            <a:schemeClr val="lt1"/>
-          </a:fontRef>
-        </p:style>
-        <p:txBody>
-          <a:bodyPr rtlCol="0" anchor="ctr"/>
-          <a:lstStyle/>
-          <a:p>
-            <a:pPr algn="ctr"/>
-          </a:p>
-        </p:txBody>
-      </p:sp>
-      <p:sp>
-        <p:nvSpPr>
-          <p:cNvPr id="30" name="TextBox 29"/>
-          <p:cNvSpPr txBox="1"/>
-          <p:nvPr/>
-        </p:nvSpPr>
-        <p:spPr>
-          <a:xfrm>
             <a:off x="182880" y="4647720"/>
             <a:ext cx="6400800" cy="380000"/>
           </a:xfrm>
@@ -11632,7 +11541,7 @@
       </p:sp>
       <p:sp>
         <p:nvSpPr>
-          <p:cNvPr id="31" name="TextBox 30"/>
+          <p:cNvPr id="29" name="TextBox 28"/>
           <p:cNvSpPr txBox="1"/>
           <p:nvPr/>
         </p:nvSpPr>
@@ -11667,7 +11576,7 @@
       </p:sp>
       <p:sp>
         <p:nvSpPr>
-          <p:cNvPr id="32" name="TextBox 31"/>
+          <p:cNvPr id="30" name="TextBox 29"/>
           <p:cNvSpPr txBox="1"/>
           <p:nvPr/>
         </p:nvSpPr>
